--- a/decks/hist-renaissance-medicine/hist-renaissance-medicine_ch1_changing-ideas.pptx
+++ b/decks/hist-renaissance-medicine/hist-renaissance-medicine_ch1_changing-ideas.pptx
@@ -126,30 +126,30 @@
   <p:extLst>
     <p:ext uri="{521415D9-36F7-43E2-AB2F-B90AF26B5E84}">
       <p14:sectionLst xmlns:p14="http://schemas.microsoft.com/office/powerpoint/2010/main">
-        <p14:section name="Opening" id="{74f9cedb-e93c-ab9b-000f-a1ff017a9739}">
+        <p14:section name="Opening" id="{a59a36d0-b706-6b5c-1c01-1e50f9d1656c}">
           <p14:sldIdLst>
             <p14:sldId id="256"/>
           </p14:sldIdLst>
         </p14:section>
-        <p14:section name="Gate" id="{2652c764-af5f-a128-e853-b583afcdb2cd}">
+        <p14:section name="Gate" id="{61a5e10e-b02e-ecc7-5974-acbbfe94a23a}">
           <p14:sldIdLst>
             <p14:sldId id="257"/>
             <p14:sldId id="258"/>
           </p14:sldIdLst>
         </p14:section>
-        <p14:section name="Pre-teach" id="{9044af10-5123-3c45-fe2c-9b1dcfffdd3a}">
+        <p14:section name="Pre-teach" id="{4c2896d2-7911-9bb5-951b-f67be17c327c}">
           <p14:sldIdLst>
             <p14:sldId id="259"/>
             <p14:sldId id="260"/>
           </p14:sldIdLst>
         </p14:section>
-        <p14:section name="Read-along" id="{dee6534b-db2c-a404-30d5-1b93f4e087c5}">
+        <p14:section name="Read-along" id="{8d0f6212-98ab-fb10-28db-4b3c0d81e1d3}">
           <p14:sldIdLst>
             <p14:sldId id="261"/>
             <p14:sldId id="262"/>
           </p14:sldIdLst>
         </p14:section>
-        <p14:section name="Teach" id="{31c5c274-90c3-cc46-1c67-4d83da7f4a09}">
+        <p14:section name="Teach" id="{2b2b400d-ddc8-a177-3b69-195ce1d1ee55}">
           <p14:sldIdLst>
             <p14:sldId id="263"/>
             <p14:sldId id="264"/>
@@ -159,19 +159,19 @@
             <p14:sldId id="268"/>
           </p14:sldIdLst>
         </p14:section>
-        <p14:section name="Routes" id="{9c6361c1-501c-1e50-2e8a-26564ac2c4c2}">
+        <p14:section name="Routes" id="{af697800-5991-bbf3-ca9e-53d70334f4c4}">
           <p14:sldIdLst>
             <p14:sldId id="269"/>
             <p14:sldId id="270"/>
             <p14:sldId id="271"/>
           </p14:sldIdLst>
         </p14:section>
-        <p14:section name="Close" id="{37599a2d-404c-8376-1153-997406190243}">
+        <p14:section name="Close" id="{39a6d734-4d7e-dc9f-8cab-f9ed2bad1bcb}">
           <p14:sldIdLst>
             <p14:sldId id="272"/>
           </p14:sldIdLst>
         </p14:section>
-        <p14:section name="Answers" id="{073486b2-89bb-0284-ed09-9451c6792caa}">
+        <p14:section name="Answers" id="{7fc0f5cc-2a3d-b6d1-1ed2-68171e6865e8}">
           <p14:sldIdLst>
             <p14:sldId id="273"/>
             <p14:sldId id="274"/>
